--- a/sample/graph3.pptx
+++ b/sample/graph3.pptx
@@ -785,8 +785,8 @@
         </p:nvSpPr>
         <p:spPr>
           <a:xfrm>
-            <a:off x="4403841" y="3551822"/>
-            <a:ext cx="351475" cy="246032"/>
+            <a:off x="4374960" y="3551822"/>
+            <a:ext cx="409236" cy="246032"/>
           </a:xfrm>
           <a:prstGeom prst="roundRect">
             <a:avLst/>
@@ -801,7 +801,7 @@
           </a:ln>
         </p:spPr>
         <p:txBody>
-          <a:bodyPr rtlCol="0" anchor="ctr" lIns="18288" tIns="9144" rIns="18288" bIns="9144"/>
+          <a:bodyPr rtlCol="0" anchor="ctr" wrap="none" lIns="0" tIns="0" rIns="0" bIns="0"/>
           <a:lstStyle/>
           <a:p>
             <a:pPr algn="ctr">
@@ -830,8 +830,8 @@
         </p:nvSpPr>
         <p:spPr>
           <a:xfrm>
-            <a:off x="5143109" y="2937646"/>
-            <a:ext cx="351475" cy="246032"/>
+            <a:off x="5114228" y="2937646"/>
+            <a:ext cx="409236" cy="246032"/>
           </a:xfrm>
           <a:prstGeom prst="roundRect">
             <a:avLst/>
@@ -846,7 +846,7 @@
           </a:ln>
         </p:spPr>
         <p:txBody>
-          <a:bodyPr rtlCol="0" anchor="ctr" lIns="18288" tIns="9144" rIns="18288" bIns="9144"/>
+          <a:bodyPr rtlCol="0" anchor="ctr" wrap="none" lIns="0" tIns="0" rIns="0" bIns="0"/>
           <a:lstStyle/>
           <a:p>
             <a:pPr algn="ctr">
@@ -875,8 +875,8 @@
         </p:nvSpPr>
         <p:spPr>
           <a:xfrm>
-            <a:off x="6868558" y="3551822"/>
-            <a:ext cx="351475" cy="246032"/>
+            <a:off x="6839677" y="3551822"/>
+            <a:ext cx="409236" cy="246032"/>
           </a:xfrm>
           <a:prstGeom prst="roundRect">
             <a:avLst/>
@@ -891,7 +891,7 @@
           </a:ln>
         </p:spPr>
         <p:txBody>
-          <a:bodyPr rtlCol="0" anchor="ctr" lIns="18288" tIns="9144" rIns="18288" bIns="9144"/>
+          <a:bodyPr rtlCol="0" anchor="ctr" wrap="none" lIns="0" tIns="0" rIns="0" bIns="0"/>
           <a:lstStyle/>
           <a:p>
             <a:pPr algn="ctr">
@@ -920,8 +920,8 @@
         </p:nvSpPr>
         <p:spPr>
           <a:xfrm>
-            <a:off x="5796005" y="2888529"/>
-            <a:ext cx="492065" cy="246032"/>
+            <a:off x="5758689" y="2888529"/>
+            <a:ext cx="566697" cy="246032"/>
           </a:xfrm>
           <a:prstGeom prst="roundRect">
             <a:avLst/>
@@ -936,7 +936,7 @@
           </a:ln>
         </p:spPr>
         <p:txBody>
-          <a:bodyPr rtlCol="0" anchor="ctr" lIns="18288" tIns="9144" rIns="18288" bIns="9144"/>
+          <a:bodyPr rtlCol="0" anchor="ctr" wrap="none" lIns="0" tIns="0" rIns="0" bIns="0"/>
           <a:lstStyle/>
           <a:p>
             <a:pPr algn="ctr">
@@ -965,8 +965,8 @@
         </p:nvSpPr>
         <p:spPr>
           <a:xfrm>
-            <a:off x="5537347" y="4114182"/>
-            <a:ext cx="351475" cy="246032"/>
+            <a:off x="5508466" y="4114182"/>
+            <a:ext cx="409236" cy="246032"/>
           </a:xfrm>
           <a:prstGeom prst="roundRect">
             <a:avLst/>
@@ -981,7 +981,7 @@
           </a:ln>
         </p:spPr>
         <p:txBody>
-          <a:bodyPr rtlCol="0" anchor="ctr" lIns="18288" tIns="9144" rIns="18288" bIns="9144"/>
+          <a:bodyPr rtlCol="0" anchor="ctr" wrap="none" lIns="0" tIns="0" rIns="0" bIns="0"/>
           <a:lstStyle/>
           <a:p>
             <a:pPr algn="ctr">

--- a/sample/graph3.pptx
+++ b/sample/graph3.pptx
@@ -785,8 +785,8 @@
         </p:nvSpPr>
         <p:spPr>
           <a:xfrm>
-            <a:off x="4374960" y="3551822"/>
-            <a:ext cx="409236" cy="246032"/>
+            <a:off x="4373661" y="3538513"/>
+            <a:ext cx="411835" cy="272651"/>
           </a:xfrm>
           <a:prstGeom prst="roundRect">
             <a:avLst/>
@@ -830,8 +830,8 @@
         </p:nvSpPr>
         <p:spPr>
           <a:xfrm>
-            <a:off x="5114228" y="2937646"/>
-            <a:ext cx="409236" cy="246032"/>
+            <a:off x="5112929" y="2924337"/>
+            <a:ext cx="411835" cy="272651"/>
           </a:xfrm>
           <a:prstGeom prst="roundRect">
             <a:avLst/>
@@ -875,8 +875,8 @@
         </p:nvSpPr>
         <p:spPr>
           <a:xfrm>
-            <a:off x="6839677" y="3551822"/>
-            <a:ext cx="409236" cy="246032"/>
+            <a:off x="6838378" y="3538513"/>
+            <a:ext cx="411835" cy="272651"/>
           </a:xfrm>
           <a:prstGeom prst="roundRect">
             <a:avLst/>
@@ -920,8 +920,8 @@
         </p:nvSpPr>
         <p:spPr>
           <a:xfrm>
-            <a:off x="5758689" y="2888529"/>
-            <a:ext cx="566697" cy="246032"/>
+            <a:off x="5757390" y="2875220"/>
+            <a:ext cx="569296" cy="272651"/>
           </a:xfrm>
           <a:prstGeom prst="roundRect">
             <a:avLst/>
@@ -965,8 +965,8 @@
         </p:nvSpPr>
         <p:spPr>
           <a:xfrm>
-            <a:off x="5508466" y="4114182"/>
-            <a:ext cx="409236" cy="246032"/>
+            <a:off x="5507167" y="4100872"/>
+            <a:ext cx="411835" cy="272651"/>
           </a:xfrm>
           <a:prstGeom prst="roundRect">
             <a:avLst/>

--- a/sample/graph3.pptx
+++ b/sample/graph3.pptx
@@ -111,7 +111,7 @@
           </a:ln>
         </p:spPr>
         <p:txBody>
-          <a:bodyPr rtlCol="0" anchor="t" lIns="18288" tIns="9144" rIns="18288" bIns="9144"/>
+          <a:bodyPr rtlCol="0" anchor="t" wrap="none" lIns="18288" tIns="9144" rIns="18288" bIns="9144"/>
           <a:lstStyle/>
           <a:p>
             <a:pPr algn="ctr">
@@ -156,7 +156,7 @@
           </a:ln>
         </p:spPr>
         <p:txBody>
-          <a:bodyPr rtlCol="0" anchor="ctr" lIns="18288" tIns="9144" rIns="18288" bIns="9144"/>
+          <a:bodyPr rtlCol="0" anchor="ctr" wrap="none" lIns="18288" tIns="9144" rIns="18288" bIns="9144"/>
           <a:lstStyle/>
           <a:p>
             <a:pPr algn="ctr">
@@ -201,7 +201,7 @@
           </a:ln>
         </p:spPr>
         <p:txBody>
-          <a:bodyPr rtlCol="0" anchor="ctr" lIns="18288" tIns="9144" rIns="18288" bIns="9144"/>
+          <a:bodyPr rtlCol="0" anchor="ctr" wrap="none" lIns="18288" tIns="9144" rIns="18288" bIns="9144"/>
           <a:lstStyle/>
           <a:p>
             <a:pPr algn="ctr">
@@ -263,7 +263,7 @@
           </a:ln>
         </p:spPr>
         <p:txBody>
-          <a:bodyPr rtlCol="0" anchor="ctr" lIns="18288" tIns="9144" rIns="18288" bIns="9144"/>
+          <a:bodyPr rtlCol="0" anchor="ctr" wrap="none" lIns="18288" tIns="9144" rIns="18288" bIns="9144"/>
           <a:lstStyle/>
           <a:p>
             <a:pPr algn="ctr">
@@ -308,7 +308,7 @@
           </a:ln>
         </p:spPr>
         <p:txBody>
-          <a:bodyPr rtlCol="0" anchor="ctr" lIns="18288" tIns="9144" rIns="18288" bIns="9144"/>
+          <a:bodyPr rtlCol="0" anchor="ctr" wrap="none" lIns="18288" tIns="9144" rIns="18288" bIns="9144"/>
           <a:lstStyle/>
           <a:p>
             <a:pPr algn="ctr">
@@ -353,7 +353,7 @@
           </a:ln>
         </p:spPr>
         <p:txBody>
-          <a:bodyPr rtlCol="0" anchor="ctr" lIns="18288" tIns="9144" rIns="18288" bIns="9144"/>
+          <a:bodyPr rtlCol="0" anchor="ctr" wrap="none" lIns="18288" tIns="9144" rIns="18288" bIns="9144"/>
           <a:lstStyle/>
           <a:p>
             <a:pPr algn="ctr">
@@ -398,7 +398,7 @@
           </a:ln>
         </p:spPr>
         <p:txBody>
-          <a:bodyPr rtlCol="0" anchor="ctr" lIns="18288" tIns="9144" rIns="18288" bIns="9144"/>
+          <a:bodyPr rtlCol="0" anchor="ctr" wrap="none" lIns="18288" tIns="9144" rIns="18288" bIns="9144"/>
           <a:lstStyle/>
           <a:p>
             <a:pPr algn="ctr">
@@ -445,7 +445,7 @@
           </a:ln>
         </p:spPr>
         <p:txBody>
-          <a:bodyPr rtlCol="0" anchor="ctr" lIns="18288" tIns="9144" rIns="18288" bIns="9144"/>
+          <a:bodyPr rtlCol="0" anchor="ctr" wrap="none" lIns="18288" tIns="9144" rIns="18288" bIns="9144"/>
           <a:lstStyle/>
           <a:p>
             <a:pPr algn="ctr">
